--- a/poster/TwinShield_Poster.pptx
+++ b/poster/TwinShield_Poster.pptx
@@ -1058,7 +1058,7 @@
                 <a:ea typeface="Arial" pitchFamily="34" charset="-122"/>
                 <a:cs typeface="Arial" pitchFamily="34" charset="-120"/>
               </a:rPr>
-              <a:t>[Name 1 (Reg. No.)], [Name 2 (Reg. No.)], [Name 3 (Reg. No.)]</a:t>
+              <a:t>Ramya Nakshathra (23BCE1611), Agilan (23BCE1790)</a:t>
             </a:r>
             <a:endParaRPr lang="en-US" sz="1050" dirty="0"/>
           </a:p>
@@ -1111,7 +1111,7 @@
                 <a:ea typeface="Arial" pitchFamily="34" charset="-122"/>
                 <a:cs typeface="Arial" pitchFamily="34" charset="-120"/>
               </a:rPr>
-              <a:t>[Dr. Guide Name (Emp. ID)]</a:t>
+              <a:t>Dr. S. Anubha Pearline, Assistant Professor</a:t>
             </a:r>
             <a:endParaRPr lang="en-US" sz="1050" dirty="0"/>
           </a:p>
@@ -1164,7 +1164,7 @@
                 <a:ea typeface="Arial" pitchFamily="34" charset="-122"/>
                 <a:cs typeface="Arial" pitchFamily="34" charset="-120"/>
               </a:rPr>
-              <a:t>[School Name], VIT Chennai</a:t>
+              <a:t>School of Computer Science and Engineering, VIT Chennai</a:t>
             </a:r>
             <a:endParaRPr lang="en-US" sz="1050" dirty="0"/>
           </a:p>
@@ -4078,8 +4078,8 @@
         </p:blipFill>
         <p:spPr>
           <a:xfrm>
-            <a:off x="9578340" y="3026664"/>
-            <a:ext cx="2121408" cy="1472973"/>
+            <a:off x="9816084" y="3026664"/>
+            <a:ext cx="1645920" cy="1142824"/>
           </a:xfrm>
           <a:prstGeom prst="rect">
             <a:avLst/>
@@ -4094,7 +4094,7 @@
         </p:nvSpPr>
         <p:spPr>
           <a:xfrm>
-            <a:off x="8741664" y="4536213"/>
+            <a:off x="8741664" y="4206064"/>
             <a:ext cx="3794760" cy="274320"/>
           </a:xfrm>
           <a:prstGeom prst="rect">
@@ -4122,7 +4122,7 @@
                 <a:ea typeface="Times New Roman" pitchFamily="34" charset="-122"/>
                 <a:cs typeface="Times New Roman" pitchFamily="34" charset="-120"/>
               </a:rPr>
-              <a:t>Leave-one-attack-out: brake tampering removed from every training stage; detection on its 119 held-out frames.</a:t>
+              <a:t>Leave-one-attack-out: brake tampering removed from every training stage.</a:t>
             </a:r>
             <a:endParaRPr lang="en-US" sz="900" dirty="0"/>
           </a:p>
@@ -4136,7 +4136,7 @@
         </p:nvSpPr>
         <p:spPr>
           <a:xfrm>
-            <a:off x="8741664" y="4901973"/>
+            <a:off x="8741664" y="4571824"/>
             <a:ext cx="3794760" cy="960669"/>
           </a:xfrm>
           <a:prstGeom prst="rect">
@@ -4168,7 +4168,7 @@
                 <a:ea typeface="Times New Roman" pitchFamily="34" charset="-122"/>
                 <a:cs typeface="Times New Roman" pitchFamily="34" charset="-120"/>
               </a:rPr>
-              <a:t>On the closed set the four architectures span only 0.0031 macro-F1; under quarantine they separate by 74 points, and every detection comes from the gate, not the classifier.</a:t>
+              <a:t>On the closed set the four architectures span only 0.0031 macro-F1; under quarantine they separate by 74 points, and every detection comes from the gate.</a:t>
             </a:r>
             <a:endParaRPr lang="en-US" sz="950" dirty="0"/>
           </a:p>
@@ -4206,7 +4206,7 @@
         </p:nvSpPr>
         <p:spPr>
           <a:xfrm>
-            <a:off x="8741664" y="5963226"/>
+            <a:off x="8741664" y="5633077"/>
             <a:ext cx="3794760" cy="237744"/>
           </a:xfrm>
           <a:prstGeom prst="rect">
@@ -4245,7 +4245,7 @@
         </p:nvSpPr>
         <p:spPr>
           <a:xfrm>
-            <a:off x="8741664" y="6237546"/>
+            <a:off x="8741664" y="5907397"/>
             <a:ext cx="3794760" cy="1006389"/>
           </a:xfrm>
           <a:prstGeom prst="rect">
@@ -4325,7 +4325,7 @@
                 <a:ea typeface="Times New Roman" pitchFamily="34" charset="-122"/>
                 <a:cs typeface="Times New Roman" pitchFamily="34" charset="-120"/>
               </a:rPr>
-              <a:t>Its boundary is measured, not assumed: implausible payloads are caught, plausible ones are not.</a:t>
+              <a:t>Its boundary is measured: implausible payloads are caught, plausible ones are not.</a:t>
             </a:r>
             <a:endParaRPr lang="en-US" sz="950" dirty="0"/>
           </a:p>
@@ -4339,7 +4339,7 @@
         </p:nvSpPr>
         <p:spPr>
           <a:xfrm>
-            <a:off x="8741664" y="7344519"/>
+            <a:off x="8741664" y="7014369"/>
             <a:ext cx="3794760" cy="237744"/>
           </a:xfrm>
           <a:prstGeom prst="rect">
@@ -4378,7 +4378,7 @@
         </p:nvSpPr>
         <p:spPr>
           <a:xfrm>
-            <a:off x="8741664" y="7618839"/>
+            <a:off x="8741664" y="7288689"/>
             <a:ext cx="3794760" cy="1256751"/>
           </a:xfrm>
           <a:prstGeom prst="rect">
@@ -4482,7 +4482,7 @@
                 <a:ea typeface="Times New Roman" pitchFamily="34" charset="-122"/>
                 <a:cs typeface="Times New Roman" pitchFamily="34" charset="-120"/>
               </a:rPr>
-              <a:t>M. Hanselmann et al., "CANet: Unsupervised IDS for CAN bus data," IEEE Access, 8:58194, 2020.</a:t>
+              <a:t>M. Hanselmann et al., "CANet: Unsupervised IDS for CAN data," IEEE Access, 8, 2020.</a:t>
             </a:r>
             <a:endParaRPr lang="en-US" sz="850" dirty="0"/>
           </a:p>
@@ -4506,7 +4506,7 @@
                 <a:ea typeface="Times New Roman" pitchFamily="34" charset="-122"/>
                 <a:cs typeface="Times New Roman" pitchFamily="34" charset="-120"/>
               </a:rPr>
-              <a:t>M. Tavasoli et al., "GEM-CAN: Real-world CAN-bus attack scenarios," 2024.</a:t>
+              <a:t>M. Tavasoli et al., "GEM-CAN: Real-world CAN-bus attacks," 2024.</a:t>
             </a:r>
             <a:endParaRPr lang="en-US" sz="850" dirty="0"/>
           </a:p>
@@ -4520,7 +4520,7 @@
         </p:nvSpPr>
         <p:spPr>
           <a:xfrm>
-            <a:off x="8741664" y="8976174"/>
+            <a:off x="8741664" y="8646025"/>
             <a:ext cx="3794760" cy="237744"/>
           </a:xfrm>
           <a:prstGeom prst="rect">
@@ -4559,8 +4559,8 @@
         </p:nvSpPr>
         <p:spPr>
           <a:xfrm>
-            <a:off x="8741664" y="9250494"/>
-            <a:ext cx="3794760" cy="192115"/>
+            <a:off x="8741664" y="8920345"/>
+            <a:ext cx="3794760" cy="164592"/>
           </a:xfrm>
           <a:prstGeom prst="rect">
             <a:avLst/>
@@ -4572,10 +4572,7 @@
           <a:bodyPr wrap="square" lIns="0" tIns="0" rIns="0" bIns="0" rtlCol="0" anchor="ctr"/>
           <a:lstStyle/>
           <a:p>
-            <a:pPr algn="just" indent="0" marL="0">
-              <a:lnSpc>
-                <a:spcPct val="94000"/>
-              </a:lnSpc>
+            <a:pPr indent="0" marL="0">
               <a:buNone/>
             </a:pPr>
             <a:r>
@@ -4587,12 +4584,9 @@
                 <a:ea typeface="Times New Roman" pitchFamily="34" charset="-122"/>
                 <a:cs typeface="Times New Roman" pitchFamily="34" charset="-120"/>
               </a:rPr>
-              <a:t>Email: </a:t>
-            </a:r>
-            <a:pPr algn="just" indent="0" marL="0">
-              <a:lnSpc>
-                <a:spcPct val="94000"/>
-              </a:lnSpc>
+              <a:t>Ramya Nakshathra</a:t>
+            </a:r>
+            <a:pPr indent="0" marL="0">
               <a:buNone/>
             </a:pPr>
             <a:r>
@@ -4604,12 +4598,34 @@
                 <a:ea typeface="Times New Roman" pitchFamily="34" charset="-122"/>
                 <a:cs typeface="Times New Roman" pitchFamily="34" charset="-120"/>
               </a:rPr>
-              <a:t>[student@vitstudent.ac.in]   </a:t>
-            </a:r>
-            <a:pPr algn="just" indent="0" marL="0">
-              <a:lnSpc>
-                <a:spcPct val="94000"/>
-              </a:lnSpc>
+              <a:t>   +91 91235 35795</a:t>
+            </a:r>
+            <a:endParaRPr lang="en-US" sz="950" dirty="0"/>
+          </a:p>
+        </p:txBody>
+      </p:sp>
+      <p:sp>
+        <p:nvSpPr>
+          <p:cNvPr id="39" name="Text 32"/>
+          <p:cNvSpPr txBox="1"/>
+          <p:nvPr/>
+        </p:nvSpPr>
+        <p:spPr>
+          <a:xfrm>
+            <a:off x="8741664" y="9084937"/>
+            <a:ext cx="3794760" cy="164592"/>
+          </a:xfrm>
+          <a:prstGeom prst="rect">
+            <a:avLst/>
+          </a:prstGeom>
+          <a:noFill/>
+          <a:ln/>
+        </p:spPr>
+        <p:txBody>
+          <a:bodyPr wrap="square" lIns="0" tIns="0" rIns="0" bIns="0" rtlCol="0" anchor="ctr"/>
+          <a:lstStyle/>
+          <a:p>
+            <a:pPr indent="0" marL="0">
               <a:buNone/>
             </a:pPr>
             <a:r>
@@ -4621,12 +4637,9 @@
                 <a:ea typeface="Times New Roman" pitchFamily="34" charset="-122"/>
                 <a:cs typeface="Times New Roman" pitchFamily="34" charset="-120"/>
               </a:rPr>
-              <a:t>Mobile: </a:t>
-            </a:r>
-            <a:pPr algn="just" indent="0" marL="0">
-              <a:lnSpc>
-                <a:spcPct val="94000"/>
-              </a:lnSpc>
+              <a:t>Agilan</a:t>
+            </a:r>
+            <a:pPr indent="0" marL="0">
               <a:buNone/>
             </a:pPr>
             <a:r>
@@ -4638,7 +4651,60 @@
                 <a:ea typeface="Times New Roman" pitchFamily="34" charset="-122"/>
                 <a:cs typeface="Times New Roman" pitchFamily="34" charset="-120"/>
               </a:rPr>
-              <a:t>[+91 XXXXXXXXXX]</a:t>
+              <a:t>   +91 81222 45774</a:t>
+            </a:r>
+            <a:endParaRPr lang="en-US" sz="950" dirty="0"/>
+          </a:p>
+        </p:txBody>
+      </p:sp>
+      <p:sp>
+        <p:nvSpPr>
+          <p:cNvPr id="40" name="Text 33"/>
+          <p:cNvSpPr txBox="1"/>
+          <p:nvPr/>
+        </p:nvSpPr>
+        <p:spPr>
+          <a:xfrm>
+            <a:off x="8741664" y="9249529"/>
+            <a:ext cx="3794760" cy="164592"/>
+          </a:xfrm>
+          <a:prstGeom prst="rect">
+            <a:avLst/>
+          </a:prstGeom>
+          <a:noFill/>
+          <a:ln/>
+        </p:spPr>
+        <p:txBody>
+          <a:bodyPr wrap="square" lIns="0" tIns="0" rIns="0" bIns="0" rtlCol="0" anchor="ctr"/>
+          <a:lstStyle/>
+          <a:p>
+            <a:pPr indent="0" marL="0">
+              <a:buNone/>
+            </a:pPr>
+            <a:r>
+              <a:rPr lang="en-US" sz="950" b="1" dirty="0">
+                <a:solidFill>
+                  <a:srgbClr val="231F20"/>
+                </a:solidFill>
+                <a:latin typeface="Times New Roman" pitchFamily="34" charset="0"/>
+                <a:ea typeface="Times New Roman" pitchFamily="34" charset="-122"/>
+                <a:cs typeface="Times New Roman" pitchFamily="34" charset="-120"/>
+              </a:rPr>
+              <a:t>Dr. S. Anubha Pearline (Guide)</a:t>
+            </a:r>
+            <a:pPr indent="0" marL="0">
+              <a:buNone/>
+            </a:pPr>
+            <a:r>
+              <a:rPr lang="en-US" sz="950" dirty="0">
+                <a:solidFill>
+                  <a:srgbClr val="231F20"/>
+                </a:solidFill>
+                <a:latin typeface="Times New Roman" pitchFamily="34" charset="0"/>
+                <a:ea typeface="Times New Roman" pitchFamily="34" charset="-122"/>
+                <a:cs typeface="Times New Roman" pitchFamily="34" charset="-120"/>
+              </a:rPr>
+              <a:t>   +91 99940 31215</a:t>
             </a:r>
             <a:endParaRPr lang="en-US" sz="950" dirty="0"/>
           </a:p>
